--- a/PPTs/L2-Exercises ANS.pptx
+++ b/PPTs/L2-Exercises ANS.pptx
@@ -334,14 +334,14 @@
           <a:effectLst/>
           <a:extLst>
             <a:ext uri="{909E8E84-426E-40dd-AFC4-6F175D3DCCD1}">
-              <a14:hiddenFill xmlns="" xmlns:a14="http://schemas.microsoft.com/office/drawing/2010/main">
+              <a14:hiddenFill xmlns:a14="http://schemas.microsoft.com/office/drawing/2010/main" xmlns="">
                 <a:solidFill>
                   <a:schemeClr val="bg1"/>
                 </a:solidFill>
               </a14:hiddenFill>
             </a:ext>
             <a:ext uri="{91240B29-F687-4f45-9708-019B960494DF}">
-              <a14:hiddenLine xmlns="" xmlns:a14="http://schemas.microsoft.com/office/drawing/2010/main" w="12700">
+              <a14:hiddenLine xmlns:a14="http://schemas.microsoft.com/office/drawing/2010/main" xmlns="" w="12700">
                 <a:pattFill prst="narHorz">
                   <a:fgClr>
                     <a:schemeClr val="tx1"/>
@@ -356,7 +356,7 @@
               </a14:hiddenLine>
             </a:ext>
             <a:ext uri="{AF507438-7753-43e0-B8FC-AC1667EBCBE1}">
-              <a14:hiddenEffects xmlns="" xmlns:a14="http://schemas.microsoft.com/office/drawing/2010/main">
+              <a14:hiddenEffects xmlns:a14="http://schemas.microsoft.com/office/drawing/2010/main" xmlns="">
                 <a:effectLst>
                   <a:outerShdw dist="35921" dir="2700000" algn="ctr" rotWithShape="0">
                     <a:schemeClr val="bg2"/>
@@ -592,14 +592,14 @@
           <a:effectLst/>
           <a:extLst>
             <a:ext uri="{909E8E84-426E-40dd-AFC4-6F175D3DCCD1}">
-              <a14:hiddenFill xmlns="" xmlns:a14="http://schemas.microsoft.com/office/drawing/2010/main">
+              <a14:hiddenFill xmlns:a14="http://schemas.microsoft.com/office/drawing/2010/main" xmlns="">
                 <a:solidFill>
                   <a:schemeClr val="bg1"/>
                 </a:solidFill>
               </a14:hiddenFill>
             </a:ext>
             <a:ext uri="{91240B29-F687-4f45-9708-019B960494DF}">
-              <a14:hiddenLine xmlns="" xmlns:a14="http://schemas.microsoft.com/office/drawing/2010/main" w="12700">
+              <a14:hiddenLine xmlns:a14="http://schemas.microsoft.com/office/drawing/2010/main" xmlns="" w="12700">
                 <a:pattFill prst="narHorz">
                   <a:fgClr>
                     <a:schemeClr val="tx1"/>
@@ -614,7 +614,7 @@
               </a14:hiddenLine>
             </a:ext>
             <a:ext uri="{AF507438-7753-43e0-B8FC-AC1667EBCBE1}">
-              <a14:hiddenEffects xmlns="" xmlns:a14="http://schemas.microsoft.com/office/drawing/2010/main">
+              <a14:hiddenEffects xmlns:a14="http://schemas.microsoft.com/office/drawing/2010/main" xmlns="">
                 <a:effectLst>
                   <a:outerShdw dist="35921" dir="2700000" algn="ctr" rotWithShape="0">
                     <a:schemeClr val="bg2"/>
@@ -682,17 +682,17 @@
           <a:effectLst/>
           <a:extLst>
             <a:ext uri="{FAA26D3D-D897-4be2-8F04-BA451C77F1D7}">
-              <ma14:placeholderFlag xmlns="" xmlns:ma14="http://schemas.microsoft.com/office/mac/drawingml/2011/main" val="1"/>
+              <ma14:placeholderFlag xmlns:ma14="http://schemas.microsoft.com/office/mac/drawingml/2011/main" xmlns="" val="1"/>
             </a:ext>
             <a:ext uri="{909E8E84-426E-40dd-AFC4-6F175D3DCCD1}">
-              <a14:hiddenFill xmlns="" xmlns:a14="http://schemas.microsoft.com/office/drawing/2010/main">
+              <a14:hiddenFill xmlns:a14="http://schemas.microsoft.com/office/drawing/2010/main" xmlns="">
                 <a:solidFill>
                   <a:srgbClr val="FFFFFF"/>
                 </a:solidFill>
               </a14:hiddenFill>
             </a:ext>
             <a:ext uri="{AF507438-7753-43e0-B8FC-AC1667EBCBE1}">
-              <a14:hiddenEffects xmlns="" xmlns:a14="http://schemas.microsoft.com/office/drawing/2010/main">
+              <a14:hiddenEffects xmlns:a14="http://schemas.microsoft.com/office/drawing/2010/main" xmlns="">
                 <a:effectLst>
                   <a:outerShdw blurRad="63500" dist="38099" dir="2700000" algn="ctr" rotWithShape="0">
                     <a:srgbClr val="000000">
@@ -703,7 +703,7 @@
               </a14:hiddenEffects>
             </a:ext>
             <a:ext uri="{53640926-AAD7-44d8-BBD7-CCE9431645EC}">
-              <a14:shadowObscured xmlns="" xmlns:a14="http://schemas.microsoft.com/office/drawing/2010/main" val="1"/>
+              <a14:shadowObscured xmlns:a14="http://schemas.microsoft.com/office/drawing/2010/main" xmlns="" val="1"/>
             </a:ext>
           </a:extLst>
         </p:spPr>
@@ -733,14 +733,14 @@
           <a:effectLst/>
           <a:extLst>
             <a:ext uri="{909E8E84-426E-40dd-AFC4-6F175D3DCCD1}">
-              <a14:hiddenFill xmlns="" xmlns:a14="http://schemas.microsoft.com/office/drawing/2010/main">
+              <a14:hiddenFill xmlns:a14="http://schemas.microsoft.com/office/drawing/2010/main" xmlns="">
                 <a:solidFill>
                   <a:schemeClr val="bg1"/>
                 </a:solidFill>
               </a14:hiddenFill>
             </a:ext>
             <a:ext uri="{91240B29-F687-4f45-9708-019B960494DF}">
-              <a14:hiddenLine xmlns="" xmlns:a14="http://schemas.microsoft.com/office/drawing/2010/main" w="12700">
+              <a14:hiddenLine xmlns:a14="http://schemas.microsoft.com/office/drawing/2010/main" xmlns="" w="12700">
                 <a:pattFill prst="narHorz">
                   <a:fgClr>
                     <a:schemeClr val="tx1"/>
@@ -755,7 +755,7 @@
               </a14:hiddenLine>
             </a:ext>
             <a:ext uri="{AF507438-7753-43e0-B8FC-AC1667EBCBE1}">
-              <a14:hiddenEffects xmlns="" xmlns:a14="http://schemas.microsoft.com/office/drawing/2010/main">
+              <a14:hiddenEffects xmlns:a14="http://schemas.microsoft.com/office/drawing/2010/main" xmlns="">
                 <a:effectLst>
                   <a:outerShdw dist="35921" dir="2700000" algn="ctr" rotWithShape="0">
                     <a:schemeClr val="bg2"/>
@@ -1005,10 +1005,10 @@
         <p:spPr>
           <a:extLst>
             <a:ext uri="{FAA26D3D-D897-4be2-8F04-BA451C77F1D7}">
-              <ma14:placeholderFlag xmlns:ma14="http://schemas.microsoft.com/office/mac/drawingml/2011/main" xmlns="" val="1"/>
+              <ma14:placeholderFlag xmlns="" xmlns:ma14="http://schemas.microsoft.com/office/mac/drawingml/2011/main" val="1"/>
             </a:ext>
             <a:ext uri="{AF507438-7753-43e0-B8FC-AC1667EBCBE1}">
-              <a14:hiddenEffects xmlns:a14="http://schemas.microsoft.com/office/drawing/2010/main" xmlns="">
+              <a14:hiddenEffects xmlns="" xmlns:a14="http://schemas.microsoft.com/office/drawing/2010/main">
                 <a:effectLst>
                   <a:outerShdw blurRad="63500" dist="38099" dir="2700000" algn="ctr" rotWithShape="0">
                     <a:schemeClr val="bg2">
@@ -4854,17 +4854,17 @@
           <a:effectLst/>
           <a:extLst>
             <a:ext uri="{FAA26D3D-D897-4be2-8F04-BA451C77F1D7}">
-              <ma14:placeholderFlag xmlns="" xmlns:ma14="http://schemas.microsoft.com/office/mac/drawingml/2011/main" val="1"/>
+              <ma14:placeholderFlag xmlns:ma14="http://schemas.microsoft.com/office/mac/drawingml/2011/main" xmlns="" val="1"/>
             </a:ext>
             <a:ext uri="{909E8E84-426E-40dd-AFC4-6F175D3DCCD1}">
-              <a14:hiddenFill xmlns="" xmlns:a14="http://schemas.microsoft.com/office/drawing/2010/main">
+              <a14:hiddenFill xmlns:a14="http://schemas.microsoft.com/office/drawing/2010/main" xmlns="">
                 <a:solidFill>
                   <a:schemeClr val="bg1"/>
                 </a:solidFill>
               </a14:hiddenFill>
             </a:ext>
             <a:ext uri="{91240B29-F687-4f45-9708-019B960494DF}">
-              <a14:hiddenLine xmlns="" xmlns:a14="http://schemas.microsoft.com/office/drawing/2010/main" w="12700">
+              <a14:hiddenLine xmlns:a14="http://schemas.microsoft.com/office/drawing/2010/main" xmlns="" w="12700">
                 <a:pattFill prst="narHorz">
                   <a:fgClr>
                     <a:schemeClr val="tx1"/>
@@ -4879,7 +4879,7 @@
               </a14:hiddenLine>
             </a:ext>
             <a:ext uri="{AF507438-7753-43e0-B8FC-AC1667EBCBE1}">
-              <a14:hiddenEffects xmlns="" xmlns:a14="http://schemas.microsoft.com/office/drawing/2010/main">
+              <a14:hiddenEffects xmlns:a14="http://schemas.microsoft.com/office/drawing/2010/main" xmlns="">
                 <a:effectLst>
                   <a:outerShdw blurRad="63500" dist="38099" dir="2700000" algn="ctr" rotWithShape="0">
                     <a:schemeClr val="bg2">
@@ -4932,17 +4932,17 @@
           <a:effectLst/>
           <a:extLst>
             <a:ext uri="{FAA26D3D-D897-4be2-8F04-BA451C77F1D7}">
-              <ma14:placeholderFlag xmlns="" xmlns:ma14="http://schemas.microsoft.com/office/mac/drawingml/2011/main" val="1"/>
+              <ma14:placeholderFlag xmlns:ma14="http://schemas.microsoft.com/office/mac/drawingml/2011/main" xmlns="" val="1"/>
             </a:ext>
             <a:ext uri="{909E8E84-426E-40dd-AFC4-6F175D3DCCD1}">
-              <a14:hiddenFill xmlns="" xmlns:a14="http://schemas.microsoft.com/office/drawing/2010/main">
+              <a14:hiddenFill xmlns:a14="http://schemas.microsoft.com/office/drawing/2010/main" xmlns="">
                 <a:solidFill>
                   <a:schemeClr val="bg1"/>
                 </a:solidFill>
               </a14:hiddenFill>
             </a:ext>
             <a:ext uri="{91240B29-F687-4f45-9708-019B960494DF}">
-              <a14:hiddenLine xmlns="" xmlns:a14="http://schemas.microsoft.com/office/drawing/2010/main" w="12700">
+              <a14:hiddenLine xmlns:a14="http://schemas.microsoft.com/office/drawing/2010/main" xmlns="" w="12700">
                 <a:pattFill prst="narHorz">
                   <a:fgClr>
                     <a:schemeClr val="tx1"/>
@@ -4957,7 +4957,7 @@
               </a14:hiddenLine>
             </a:ext>
             <a:ext uri="{AF507438-7753-43e0-B8FC-AC1667EBCBE1}">
-              <a14:hiddenEffects xmlns="" xmlns:a14="http://schemas.microsoft.com/office/drawing/2010/main">
+              <a14:hiddenEffects xmlns:a14="http://schemas.microsoft.com/office/drawing/2010/main" xmlns="">
                 <a:effectLst>
                   <a:outerShdw blurRad="63500" dist="38099" dir="2700000" algn="ctr" rotWithShape="0">
                     <a:schemeClr val="bg2">
@@ -5036,14 +5036,14 @@
           <a:effectLst/>
           <a:extLst>
             <a:ext uri="{909E8E84-426E-40dd-AFC4-6F175D3DCCD1}">
-              <a14:hiddenFill xmlns="" xmlns:a14="http://schemas.microsoft.com/office/drawing/2010/main">
+              <a14:hiddenFill xmlns:a14="http://schemas.microsoft.com/office/drawing/2010/main" xmlns="">
                 <a:solidFill>
                   <a:schemeClr val="bg1"/>
                 </a:solidFill>
               </a14:hiddenFill>
             </a:ext>
             <a:ext uri="{91240B29-F687-4f45-9708-019B960494DF}">
-              <a14:hiddenLine xmlns="" xmlns:a14="http://schemas.microsoft.com/office/drawing/2010/main" w="12700">
+              <a14:hiddenLine xmlns:a14="http://schemas.microsoft.com/office/drawing/2010/main" xmlns="" w="12700">
                 <a:pattFill prst="narHorz">
                   <a:fgClr>
                     <a:schemeClr val="tx1"/>
@@ -5058,7 +5058,7 @@
               </a14:hiddenLine>
             </a:ext>
             <a:ext uri="{AF507438-7753-43e0-B8FC-AC1667EBCBE1}">
-              <a14:hiddenEffects xmlns="" xmlns:a14="http://schemas.microsoft.com/office/drawing/2010/main">
+              <a14:hiddenEffects xmlns:a14="http://schemas.microsoft.com/office/drawing/2010/main" xmlns="">
                 <a:effectLst>
                   <a:outerShdw dist="35921" dir="2700000" algn="ctr" rotWithShape="0">
                     <a:schemeClr val="bg2"/>
@@ -5124,12 +5124,12 @@
           <a:effectLst/>
           <a:extLst>
             <a:ext uri="{909E8E84-426E-40dd-AFC4-6F175D3DCCD1}">
-              <a14:hiddenFill xmlns="" xmlns:a14="http://schemas.microsoft.com/office/drawing/2010/main">
+              <a14:hiddenFill xmlns:a14="http://schemas.microsoft.com/office/drawing/2010/main" xmlns="">
                 <a:noFill/>
               </a14:hiddenFill>
             </a:ext>
             <a:ext uri="{AF507438-7753-43e0-B8FC-AC1667EBCBE1}">
-              <a14:hiddenEffects xmlns="" xmlns:a14="http://schemas.microsoft.com/office/drawing/2010/main">
+              <a14:hiddenEffects xmlns:a14="http://schemas.microsoft.com/office/drawing/2010/main" xmlns="">
                 <a:effectLst>
                   <a:outerShdw blurRad="63500" dist="38099" dir="2700000" algn="ctr" rotWithShape="0">
                     <a:schemeClr val="bg2">
@@ -6458,17 +6458,17 @@
           <a:effectLst/>
           <a:extLst>
             <a:ext uri="{FAA26D3D-D897-4be2-8F04-BA451C77F1D7}">
-              <ma14:placeholderFlag xmlns:ma14="http://schemas.microsoft.com/office/mac/drawingml/2011/main" xmlns="" val="1"/>
+              <ma14:placeholderFlag xmlns="" xmlns:ma14="http://schemas.microsoft.com/office/mac/drawingml/2011/main" val="1"/>
             </a:ext>
             <a:ext uri="{909E8E84-426E-40dd-AFC4-6F175D3DCCD1}">
-              <a14:hiddenFill xmlns:a14="http://schemas.microsoft.com/office/drawing/2010/main" xmlns="">
+              <a14:hiddenFill xmlns="" xmlns:a14="http://schemas.microsoft.com/office/drawing/2010/main">
                 <a:solidFill>
                   <a:schemeClr val="bg1"/>
                 </a:solidFill>
               </a14:hiddenFill>
             </a:ext>
             <a:ext uri="{91240B29-F687-4f45-9708-019B960494DF}">
-              <a14:hiddenLine xmlns:a14="http://schemas.microsoft.com/office/drawing/2010/main" xmlns="" w="12700">
+              <a14:hiddenLine xmlns="" xmlns:a14="http://schemas.microsoft.com/office/drawing/2010/main" w="12700">
                 <a:pattFill prst="narHorz">
                   <a:fgClr>
                     <a:schemeClr val="tx1"/>
@@ -6483,7 +6483,7 @@
               </a14:hiddenLine>
             </a:ext>
             <a:ext uri="{AF507438-7753-43e0-B8FC-AC1667EBCBE1}">
-              <a14:hiddenEffects xmlns:a14="http://schemas.microsoft.com/office/drawing/2010/main" xmlns="">
+              <a14:hiddenEffects xmlns="" xmlns:a14="http://schemas.microsoft.com/office/drawing/2010/main">
                 <a:effectLst>
                   <a:outerShdw blurRad="63500" dist="38099" dir="2700000" algn="ctr" rotWithShape="0">
                     <a:schemeClr val="bg2">
@@ -15079,6 +15079,119 @@
           </p:txBody>
         </p:sp>
       </p:grpSp>
+      <p:sp>
+        <p:nvSpPr>
+          <p:cNvPr id="67" name="Rectangle 66">
+            <a:extLst>
+              <a:ext uri="{FF2B5EF4-FFF2-40B4-BE49-F238E27FC236}">
+                <a16:creationId xmlns:a16="http://schemas.microsoft.com/office/drawing/2014/main" id="{AD355CD5-3F72-AC8C-1ACA-81039FC3C28C}"/>
+              </a:ext>
+            </a:extLst>
+          </p:cNvPr>
+          <p:cNvSpPr/>
+          <p:nvPr/>
+        </p:nvSpPr>
+        <p:spPr bwMode="auto">
+          <a:xfrm>
+            <a:off x="9422453" y="5428536"/>
+            <a:ext cx="2617113" cy="914400"/>
+          </a:xfrm>
+          <a:prstGeom prst="rect">
+            <a:avLst/>
+          </a:prstGeom>
+          <a:ln>
+            <a:headEnd type="none" w="med" len="med"/>
+            <a:tailEnd type="none" w="med" len="med"/>
+          </a:ln>
+          <a:extLst>
+            <a:ext uri="{AF507438-7753-43e0-B8FC-AC1667EBCBE1}">
+              <a14:hiddenEffects xmlns:a14="http://schemas.microsoft.com/office/drawing/2010/main" xmlns="">
+                <a:effectLst>
+                  <a:outerShdw dist="35921" dir="2700000" algn="ctr" rotWithShape="0">
+                    <a:schemeClr val="bg2"/>
+                  </a:outerShdw>
+                </a:effectLst>
+              </a14:hiddenEffects>
+            </a:ext>
+          </a:extLst>
+        </p:spPr>
+        <p:style>
+          <a:lnRef idx="1">
+            <a:schemeClr val="dk1"/>
+          </a:lnRef>
+          <a:fillRef idx="2">
+            <a:schemeClr val="dk1"/>
+          </a:fillRef>
+          <a:effectRef idx="1">
+            <a:schemeClr val="dk1"/>
+          </a:effectRef>
+          <a:fontRef idx="minor">
+            <a:schemeClr val="dk1"/>
+          </a:fontRef>
+        </p:style>
+        <p:txBody>
+          <a:bodyPr vert="horz" wrap="square" lIns="91440" tIns="45720" rIns="91440" bIns="45720" numCol="1" rtlCol="0" anchor="t" anchorCtr="0" compatLnSpc="1">
+            <a:prstTxWarp prst="textNoShape">
+              <a:avLst/>
+            </a:prstTxWarp>
+          </a:bodyPr>
+          <a:lstStyle/>
+          <a:p>
+            <a:pPr marL="0" marR="0" indent="0" algn="l" defTabSz="914400" rtl="0" eaLnBrk="0" fontAlgn="base" latinLnBrk="0" hangingPunct="0">
+              <a:lnSpc>
+                <a:spcPct val="100000"/>
+              </a:lnSpc>
+              <a:spcBef>
+                <a:spcPct val="0"/>
+              </a:spcBef>
+              <a:spcAft>
+                <a:spcPct val="0"/>
+              </a:spcAft>
+              <a:buClrTx/>
+              <a:buSzTx/>
+              <a:buFontTx/>
+              <a:buNone/>
+              <a:tabLst/>
+            </a:pPr>
+            <a:r>
+              <a:rPr kumimoji="0" lang="en-US" altLang="zh-CN" sz="2000" b="0" i="0" u="none" strike="noStrike" cap="none" normalizeH="0" baseline="0" dirty="0" err="1">
+                <a:ln>
+                  <a:noFill/>
+                </a:ln>
+                <a:solidFill>
+                  <a:schemeClr val="tx1"/>
+                </a:solidFill>
+                <a:effectLst/>
+                <a:latin typeface="Gill Sans"/>
+              </a:rPr>
+              <a:t>printf</a:t>
+            </a:r>
+            <a:r>
+              <a:rPr kumimoji="0" lang="en-US" altLang="zh-CN" sz="2000" b="0" i="0" u="none" strike="noStrike" cap="none" normalizeH="0" baseline="0" dirty="0">
+                <a:ln>
+                  <a:noFill/>
+                </a:ln>
+                <a:solidFill>
+                  <a:schemeClr val="tx1"/>
+                </a:solidFill>
+                <a:effectLst/>
+                <a:latin typeface="Gill Sans"/>
+              </a:rPr>
+              <a:t>() (outside for loop) executes after all fork() calls, for 8 times. </a:t>
+            </a:r>
+            <a:endParaRPr kumimoji="0" lang="zh-CN" altLang="en-US" sz="2000" b="0" i="0" u="none" strike="noStrike" cap="none" normalizeH="0" baseline="0" dirty="0">
+              <a:ln>
+                <a:noFill/>
+              </a:ln>
+              <a:solidFill>
+                <a:schemeClr val="tx1"/>
+              </a:solidFill>
+              <a:effectLst/>
+              <a:latin typeface="Gill Sans"/>
+            </a:endParaRPr>
+          </a:p>
+        </p:txBody>
+      </p:sp>
     </p:spTree>
     <p:extLst>
       <p:ext uri="{BB962C8B-B14F-4D97-AF65-F5344CB8AC3E}">
@@ -15715,17 +15828,17 @@
           <a:effectLst/>
           <a:extLst>
             <a:ext uri="{FAA26D3D-D897-4be2-8F04-BA451C77F1D7}">
-              <ma14:placeholderFlag xmlns:ma14="http://schemas.microsoft.com/office/mac/drawingml/2011/main" xmlns="" val="1"/>
+              <ma14:placeholderFlag xmlns="" xmlns:ma14="http://schemas.microsoft.com/office/mac/drawingml/2011/main" val="1"/>
             </a:ext>
             <a:ext uri="{909E8E84-426E-40dd-AFC4-6F175D3DCCD1}">
-              <a14:hiddenFill xmlns:a14="http://schemas.microsoft.com/office/drawing/2010/main" xmlns="">
+              <a14:hiddenFill xmlns="" xmlns:a14="http://schemas.microsoft.com/office/drawing/2010/main">
                 <a:solidFill>
                   <a:schemeClr val="bg1"/>
                 </a:solidFill>
               </a14:hiddenFill>
             </a:ext>
             <a:ext uri="{91240B29-F687-4f45-9708-019B960494DF}">
-              <a14:hiddenLine xmlns:a14="http://schemas.microsoft.com/office/drawing/2010/main" xmlns="" w="12700">
+              <a14:hiddenLine xmlns="" xmlns:a14="http://schemas.microsoft.com/office/drawing/2010/main" w="12700">
                 <a:pattFill prst="narHorz">
                   <a:fgClr>
                     <a:schemeClr val="tx1"/>
@@ -15740,7 +15853,7 @@
               </a14:hiddenLine>
             </a:ext>
             <a:ext uri="{AF507438-7753-43e0-B8FC-AC1667EBCBE1}">
-              <a14:hiddenEffects xmlns:a14="http://schemas.microsoft.com/office/drawing/2010/main" xmlns="">
+              <a14:hiddenEffects xmlns="" xmlns:a14="http://schemas.microsoft.com/office/drawing/2010/main">
                 <a:effectLst>
                   <a:outerShdw blurRad="63500" dist="38099" dir="2700000" algn="ctr" rotWithShape="0">
                     <a:schemeClr val="bg2">
@@ -24624,6 +24737,91 @@
           </p:txBody>
         </p:sp>
       </p:grpSp>
+      <p:sp>
+        <p:nvSpPr>
+          <p:cNvPr id="94" name="Rectangle 93">
+            <a:extLst>
+              <a:ext uri="{FF2B5EF4-FFF2-40B4-BE49-F238E27FC236}">
+                <a16:creationId xmlns:a16="http://schemas.microsoft.com/office/drawing/2014/main" id="{E846DC64-EA8D-AAAE-E0A1-A29649E22911}"/>
+              </a:ext>
+            </a:extLst>
+          </p:cNvPr>
+          <p:cNvSpPr/>
+          <p:nvPr/>
+        </p:nvSpPr>
+        <p:spPr bwMode="auto">
+          <a:xfrm>
+            <a:off x="9445526" y="4997161"/>
+            <a:ext cx="2617113" cy="1342884"/>
+          </a:xfrm>
+          <a:prstGeom prst="rect">
+            <a:avLst/>
+          </a:prstGeom>
+          <a:ln>
+            <a:headEnd type="none" w="med" len="med"/>
+            <a:tailEnd type="none" w="med" len="med"/>
+          </a:ln>
+          <a:extLst>
+            <a:ext uri="{AF507438-7753-43e0-B8FC-AC1667EBCBE1}">
+              <a14:hiddenEffects xmlns="" xmlns:a14="http://schemas.microsoft.com/office/drawing/2010/main">
+                <a:effectLst>
+                  <a:outerShdw dist="35921" dir="2700000" algn="ctr" rotWithShape="0">
+                    <a:schemeClr val="bg2"/>
+                  </a:outerShdw>
+                </a:effectLst>
+              </a14:hiddenEffects>
+            </a:ext>
+          </a:extLst>
+        </p:spPr>
+        <p:style>
+          <a:lnRef idx="1">
+            <a:schemeClr val="dk1"/>
+          </a:lnRef>
+          <a:fillRef idx="2">
+            <a:schemeClr val="dk1"/>
+          </a:fillRef>
+          <a:effectRef idx="1">
+            <a:schemeClr val="dk1"/>
+          </a:effectRef>
+          <a:fontRef idx="minor">
+            <a:schemeClr val="dk1"/>
+          </a:fontRef>
+        </p:style>
+        <p:txBody>
+          <a:bodyPr vert="horz" wrap="square" lIns="91440" tIns="45720" rIns="91440" bIns="45720" numCol="1" rtlCol="0" anchor="t" anchorCtr="0" compatLnSpc="1">
+            <a:prstTxWarp prst="textNoShape">
+              <a:avLst/>
+            </a:prstTxWarp>
+          </a:bodyPr>
+          <a:lstStyle/>
+          <a:p>
+            <a:r>
+              <a:rPr lang="en-US" altLang="zh-CN" sz="2000" b="0" dirty="0" err="1">
+                <a:solidFill>
+                  <a:schemeClr val="tx1"/>
+                </a:solidFill>
+                <a:latin typeface="Gill Sans"/>
+              </a:rPr>
+              <a:t>printf</a:t>
+            </a:r>
+            <a:r>
+              <a:rPr lang="en-US" altLang="zh-CN" sz="2000" b="0" dirty="0">
+                <a:solidFill>
+                  <a:schemeClr val="tx1"/>
+                </a:solidFill>
+                <a:latin typeface="Gill Sans"/>
+              </a:rPr>
+              <a:t>() (inside for loop) executes after fork() calls at each iteration, for 2+4+8=14 times. </a:t>
+            </a:r>
+            <a:endParaRPr lang="zh-CN" altLang="en-US" sz="2000" b="0" dirty="0">
+              <a:solidFill>
+                <a:schemeClr val="tx1"/>
+              </a:solidFill>
+              <a:latin typeface="Gill Sans"/>
+            </a:endParaRPr>
+          </a:p>
+        </p:txBody>
+      </p:sp>
     </p:spTree>
     <p:extLst>
       <p:ext uri="{BB962C8B-B14F-4D97-AF65-F5344CB8AC3E}">
@@ -24941,17 +25139,17 @@
           <a:effectLst/>
           <a:extLst>
             <a:ext uri="{FAA26D3D-D897-4be2-8F04-BA451C77F1D7}">
-              <ma14:placeholderFlag xmlns:ma14="http://schemas.microsoft.com/office/mac/drawingml/2011/main" xmlns="" val="1"/>
+              <ma14:placeholderFlag xmlns="" xmlns:ma14="http://schemas.microsoft.com/office/mac/drawingml/2011/main" val="1"/>
             </a:ext>
             <a:ext uri="{909E8E84-426E-40dd-AFC4-6F175D3DCCD1}">
-              <a14:hiddenFill xmlns:a14="http://schemas.microsoft.com/office/drawing/2010/main" xmlns="">
+              <a14:hiddenFill xmlns="" xmlns:a14="http://schemas.microsoft.com/office/drawing/2010/main">
                 <a:solidFill>
                   <a:schemeClr val="bg1"/>
                 </a:solidFill>
               </a14:hiddenFill>
             </a:ext>
             <a:ext uri="{91240B29-F687-4f45-9708-019B960494DF}">
-              <a14:hiddenLine xmlns:a14="http://schemas.microsoft.com/office/drawing/2010/main" xmlns="" w="12700">
+              <a14:hiddenLine xmlns="" xmlns:a14="http://schemas.microsoft.com/office/drawing/2010/main" w="12700">
                 <a:pattFill prst="narHorz">
                   <a:fgClr>
                     <a:schemeClr val="tx1"/>
@@ -24966,7 +25164,7 @@
               </a14:hiddenLine>
             </a:ext>
             <a:ext uri="{AF507438-7753-43e0-B8FC-AC1667EBCBE1}">
-              <a14:hiddenEffects xmlns:a14="http://schemas.microsoft.com/office/drawing/2010/main" xmlns="">
+              <a14:hiddenEffects xmlns="" xmlns:a14="http://schemas.microsoft.com/office/drawing/2010/main">
                 <a:effectLst>
                   <a:outerShdw blurRad="63500" dist="38099" dir="2700000" algn="ctr" rotWithShape="0">
                     <a:schemeClr val="bg2">
@@ -25703,17 +25901,17 @@
           <a:effectLst/>
           <a:extLst>
             <a:ext uri="{FAA26D3D-D897-4be2-8F04-BA451C77F1D7}">
-              <ma14:placeholderFlag xmlns:ma14="http://schemas.microsoft.com/office/mac/drawingml/2011/main" xmlns="" val="1"/>
+              <ma14:placeholderFlag xmlns="" xmlns:ma14="http://schemas.microsoft.com/office/mac/drawingml/2011/main" val="1"/>
             </a:ext>
             <a:ext uri="{909E8E84-426E-40dd-AFC4-6F175D3DCCD1}">
-              <a14:hiddenFill xmlns:a14="http://schemas.microsoft.com/office/drawing/2010/main" xmlns="">
+              <a14:hiddenFill xmlns="" xmlns:a14="http://schemas.microsoft.com/office/drawing/2010/main">
                 <a:solidFill>
                   <a:schemeClr val="bg1"/>
                 </a:solidFill>
               </a14:hiddenFill>
             </a:ext>
             <a:ext uri="{91240B29-F687-4f45-9708-019B960494DF}">
-              <a14:hiddenLine xmlns:a14="http://schemas.microsoft.com/office/drawing/2010/main" xmlns="" w="12700">
+              <a14:hiddenLine xmlns="" xmlns:a14="http://schemas.microsoft.com/office/drawing/2010/main" w="12700">
                 <a:pattFill prst="narHorz">
                   <a:fgClr>
                     <a:schemeClr val="tx1"/>
@@ -25728,7 +25926,7 @@
               </a14:hiddenLine>
             </a:ext>
             <a:ext uri="{AF507438-7753-43e0-B8FC-AC1667EBCBE1}">
-              <a14:hiddenEffects xmlns:a14="http://schemas.microsoft.com/office/drawing/2010/main" xmlns="">
+              <a14:hiddenEffects xmlns="" xmlns:a14="http://schemas.microsoft.com/office/drawing/2010/main">
                 <a:effectLst>
                   <a:outerShdw blurRad="63500" dist="38099" dir="2700000" algn="ctr" rotWithShape="0">
                     <a:schemeClr val="bg2">
@@ -31912,17 +32110,17 @@
           <a:effectLst/>
           <a:extLst>
             <a:ext uri="{FAA26D3D-D897-4be2-8F04-BA451C77F1D7}">
-              <ma14:placeholderFlag xmlns:ma14="http://schemas.microsoft.com/office/mac/drawingml/2011/main" xmlns="" val="1"/>
+              <ma14:placeholderFlag xmlns="" xmlns:ma14="http://schemas.microsoft.com/office/mac/drawingml/2011/main" val="1"/>
             </a:ext>
             <a:ext uri="{909E8E84-426E-40dd-AFC4-6F175D3DCCD1}">
-              <a14:hiddenFill xmlns:a14="http://schemas.microsoft.com/office/drawing/2010/main" xmlns="">
+              <a14:hiddenFill xmlns="" xmlns:a14="http://schemas.microsoft.com/office/drawing/2010/main">
                 <a:solidFill>
                   <a:schemeClr val="bg1"/>
                 </a:solidFill>
               </a14:hiddenFill>
             </a:ext>
             <a:ext uri="{91240B29-F687-4f45-9708-019B960494DF}">
-              <a14:hiddenLine xmlns:a14="http://schemas.microsoft.com/office/drawing/2010/main" xmlns="" w="12700">
+              <a14:hiddenLine xmlns="" xmlns:a14="http://schemas.microsoft.com/office/drawing/2010/main" w="12700">
                 <a:pattFill prst="narHorz">
                   <a:fgClr>
                     <a:schemeClr val="tx1"/>
@@ -31937,7 +32135,7 @@
               </a14:hiddenLine>
             </a:ext>
             <a:ext uri="{AF507438-7753-43e0-B8FC-AC1667EBCBE1}">
-              <a14:hiddenEffects xmlns:a14="http://schemas.microsoft.com/office/drawing/2010/main" xmlns="">
+              <a14:hiddenEffects xmlns="" xmlns:a14="http://schemas.microsoft.com/office/drawing/2010/main">
                 <a:effectLst>
                   <a:outerShdw blurRad="63500" dist="38099" dir="2700000" algn="ctr" rotWithShape="0">
                     <a:schemeClr val="bg2">
@@ -38340,7 +38538,7 @@
           </a:ln>
           <a:extLst>
             <a:ext uri="{AF507438-7753-43e0-B8FC-AC1667EBCBE1}">
-              <a14:hiddenEffects xmlns="" xmlns:a14="http://schemas.microsoft.com/office/drawing/2010/main">
+              <a14:hiddenEffects xmlns:a14="http://schemas.microsoft.com/office/drawing/2010/main" xmlns="">
                 <a:effectLst>
                   <a:outerShdw dist="35921" dir="2700000" algn="ctr" rotWithShape="0">
                     <a:schemeClr val="bg2"/>
@@ -39035,7 +39233,7 @@
           </a:ln>
           <a:extLst>
             <a:ext uri="{AF507438-7753-43e0-B8FC-AC1667EBCBE1}">
-              <a14:hiddenEffects xmlns="" xmlns:a14="http://schemas.microsoft.com/office/drawing/2010/main">
+              <a14:hiddenEffects xmlns:a14="http://schemas.microsoft.com/office/drawing/2010/main" xmlns="">
                 <a:effectLst>
                   <a:outerShdw dist="35921" dir="2700000" algn="ctr" rotWithShape="0">
                     <a:schemeClr val="bg2"/>
@@ -39077,7 +39275,7 @@
           </a:ln>
           <a:extLst>
             <a:ext uri="{AF507438-7753-43e0-B8FC-AC1667EBCBE1}">
-              <a14:hiddenEffects xmlns="" xmlns:a14="http://schemas.microsoft.com/office/drawing/2010/main">
+              <a14:hiddenEffects xmlns:a14="http://schemas.microsoft.com/office/drawing/2010/main" xmlns="">
                 <a:effectLst>
                   <a:outerShdw dist="35921" dir="2700000" algn="ctr" rotWithShape="0">
                     <a:schemeClr val="bg2"/>
@@ -39311,7 +39509,7 @@
           </a:ln>
           <a:extLst>
             <a:ext uri="{AF507438-7753-43e0-B8FC-AC1667EBCBE1}">
-              <a14:hiddenEffects xmlns="" xmlns:a14="http://schemas.microsoft.com/office/drawing/2010/main">
+              <a14:hiddenEffects xmlns:a14="http://schemas.microsoft.com/office/drawing/2010/main" xmlns="">
                 <a:effectLst>
                   <a:outerShdw dist="35921" dir="2700000" algn="ctr" rotWithShape="0">
                     <a:schemeClr val="bg2"/>
@@ -41311,7 +41509,7 @@
           </a:ln>
           <a:extLst>
             <a:ext uri="{AF507438-7753-43e0-B8FC-AC1667EBCBE1}">
-              <a14:hiddenEffects xmlns="" xmlns:a14="http://schemas.microsoft.com/office/drawing/2010/main">
+              <a14:hiddenEffects xmlns:a14="http://schemas.microsoft.com/office/drawing/2010/main" xmlns="">
                 <a:effectLst>
                   <a:outerShdw dist="35921" dir="2700000" algn="ctr" rotWithShape="0">
                     <a:schemeClr val="bg2"/>
@@ -42006,7 +42204,7 @@
           </a:ln>
           <a:extLst>
             <a:ext uri="{AF507438-7753-43e0-B8FC-AC1667EBCBE1}">
-              <a14:hiddenEffects xmlns="" xmlns:a14="http://schemas.microsoft.com/office/drawing/2010/main">
+              <a14:hiddenEffects xmlns:a14="http://schemas.microsoft.com/office/drawing/2010/main" xmlns="">
                 <a:effectLst>
                   <a:outerShdw dist="35921" dir="2700000" algn="ctr" rotWithShape="0">
                     <a:schemeClr val="bg2"/>
@@ -42048,7 +42246,7 @@
           </a:ln>
           <a:extLst>
             <a:ext uri="{AF507438-7753-43e0-B8FC-AC1667EBCBE1}">
-              <a14:hiddenEffects xmlns="" xmlns:a14="http://schemas.microsoft.com/office/drawing/2010/main">
+              <a14:hiddenEffects xmlns:a14="http://schemas.microsoft.com/office/drawing/2010/main" xmlns="">
                 <a:effectLst>
                   <a:outerShdw dist="35921" dir="2700000" algn="ctr" rotWithShape="0">
                     <a:schemeClr val="bg2"/>
@@ -42282,7 +42480,7 @@
           </a:ln>
           <a:extLst>
             <a:ext uri="{AF507438-7753-43e0-B8FC-AC1667EBCBE1}">
-              <a14:hiddenEffects xmlns="" xmlns:a14="http://schemas.microsoft.com/office/drawing/2010/main">
+              <a14:hiddenEffects xmlns:a14="http://schemas.microsoft.com/office/drawing/2010/main" xmlns="">
                 <a:effectLst>
                   <a:outerShdw dist="35921" dir="2700000" algn="ctr" rotWithShape="0">
                     <a:schemeClr val="bg2"/>
@@ -44325,7 +44523,7 @@
           </a:ln>
           <a:extLst>
             <a:ext uri="{AF507438-7753-43e0-B8FC-AC1667EBCBE1}">
-              <a14:hiddenEffects xmlns="" xmlns:a14="http://schemas.microsoft.com/office/drawing/2010/main">
+              <a14:hiddenEffects xmlns:a14="http://schemas.microsoft.com/office/drawing/2010/main" xmlns="">
                 <a:effectLst>
                   <a:outerShdw dist="35921" dir="2700000" algn="ctr" rotWithShape="0">
                     <a:schemeClr val="bg2"/>
@@ -44978,7 +45176,7 @@
           </a:ln>
           <a:extLst>
             <a:ext uri="{AF507438-7753-43e0-B8FC-AC1667EBCBE1}">
-              <a14:hiddenEffects xmlns="" xmlns:a14="http://schemas.microsoft.com/office/drawing/2010/main">
+              <a14:hiddenEffects xmlns:a14="http://schemas.microsoft.com/office/drawing/2010/main" xmlns="">
                 <a:effectLst>
                   <a:outerShdw dist="35921" dir="2700000" algn="ctr" rotWithShape="0">
                     <a:schemeClr val="bg2"/>
@@ -45021,7 +45219,7 @@
           </a:ln>
           <a:extLst>
             <a:ext uri="{AF507438-7753-43e0-B8FC-AC1667EBCBE1}">
-              <a14:hiddenEffects xmlns="" xmlns:a14="http://schemas.microsoft.com/office/drawing/2010/main">
+              <a14:hiddenEffects xmlns:a14="http://schemas.microsoft.com/office/drawing/2010/main" xmlns="">
                 <a:effectLst>
                   <a:outerShdw dist="35921" dir="2700000" algn="ctr" rotWithShape="0">
                     <a:schemeClr val="bg2"/>
@@ -45279,7 +45477,7 @@
           </a:ln>
           <a:extLst>
             <a:ext uri="{AF507438-7753-43e0-B8FC-AC1667EBCBE1}">
-              <a14:hiddenEffects xmlns="" xmlns:a14="http://schemas.microsoft.com/office/drawing/2010/main">
+              <a14:hiddenEffects xmlns:a14="http://schemas.microsoft.com/office/drawing/2010/main" xmlns="">
                 <a:effectLst>
                   <a:outerShdw dist="35921" dir="2700000" algn="ctr" rotWithShape="0">
                     <a:schemeClr val="bg2"/>
@@ -45377,7 +45575,7 @@
           </a:ln>
           <a:extLst>
             <a:ext uri="{AF507438-7753-43e0-B8FC-AC1667EBCBE1}">
-              <a14:hiddenEffects xmlns="" xmlns:a14="http://schemas.microsoft.com/office/drawing/2010/main">
+              <a14:hiddenEffects xmlns:a14="http://schemas.microsoft.com/office/drawing/2010/main" xmlns="">
                 <a:effectLst>
                   <a:outerShdw dist="35921" dir="2700000" algn="ctr" rotWithShape="0">
                     <a:schemeClr val="bg2"/>
@@ -45585,17 +45783,17 @@
           <a:effectLst/>
           <a:extLst>
             <a:ext uri="{FAA26D3D-D897-4be2-8F04-BA451C77F1D7}">
-              <ma14:placeholderFlag xmlns:ma14="http://schemas.microsoft.com/office/mac/drawingml/2011/main" xmlns="" val="1"/>
+              <ma14:placeholderFlag xmlns="" xmlns:ma14="http://schemas.microsoft.com/office/mac/drawingml/2011/main" val="1"/>
             </a:ext>
             <a:ext uri="{909E8E84-426E-40dd-AFC4-6F175D3DCCD1}">
-              <a14:hiddenFill xmlns:a14="http://schemas.microsoft.com/office/drawing/2010/main" xmlns="">
+              <a14:hiddenFill xmlns="" xmlns:a14="http://schemas.microsoft.com/office/drawing/2010/main">
                 <a:solidFill>
                   <a:schemeClr val="bg1"/>
                 </a:solidFill>
               </a14:hiddenFill>
             </a:ext>
             <a:ext uri="{91240B29-F687-4f45-9708-019B960494DF}">
-              <a14:hiddenLine xmlns:a14="http://schemas.microsoft.com/office/drawing/2010/main" xmlns="" w="12700">
+              <a14:hiddenLine xmlns="" xmlns:a14="http://schemas.microsoft.com/office/drawing/2010/main" w="12700">
                 <a:pattFill prst="narHorz">
                   <a:fgClr>
                     <a:schemeClr val="tx1"/>
@@ -45610,7 +45808,7 @@
               </a14:hiddenLine>
             </a:ext>
             <a:ext uri="{AF507438-7753-43e0-B8FC-AC1667EBCBE1}">
-              <a14:hiddenEffects xmlns:a14="http://schemas.microsoft.com/office/drawing/2010/main" xmlns="">
+              <a14:hiddenEffects xmlns="" xmlns:a14="http://schemas.microsoft.com/office/drawing/2010/main">
                 <a:effectLst>
                   <a:outerShdw blurRad="63500" dist="38099" dir="2700000" algn="ctr" rotWithShape="0">
                     <a:schemeClr val="bg2">
@@ -47227,17 +47425,17 @@
           <a:effectLst/>
           <a:extLst>
             <a:ext uri="{FAA26D3D-D897-4be2-8F04-BA451C77F1D7}">
-              <ma14:placeholderFlag xmlns:ma14="http://schemas.microsoft.com/office/mac/drawingml/2011/main" xmlns="" val="1"/>
+              <ma14:placeholderFlag xmlns="" xmlns:ma14="http://schemas.microsoft.com/office/mac/drawingml/2011/main" val="1"/>
             </a:ext>
             <a:ext uri="{909E8E84-426E-40dd-AFC4-6F175D3DCCD1}">
-              <a14:hiddenFill xmlns:a14="http://schemas.microsoft.com/office/drawing/2010/main" xmlns="">
+              <a14:hiddenFill xmlns="" xmlns:a14="http://schemas.microsoft.com/office/drawing/2010/main">
                 <a:solidFill>
                   <a:schemeClr val="bg1"/>
                 </a:solidFill>
               </a14:hiddenFill>
             </a:ext>
             <a:ext uri="{91240B29-F687-4f45-9708-019B960494DF}">
-              <a14:hiddenLine xmlns:a14="http://schemas.microsoft.com/office/drawing/2010/main" xmlns="" w="12700">
+              <a14:hiddenLine xmlns="" xmlns:a14="http://schemas.microsoft.com/office/drawing/2010/main" w="12700">
                 <a:pattFill prst="narHorz">
                   <a:fgClr>
                     <a:schemeClr val="tx1"/>
@@ -47252,7 +47450,7 @@
               </a14:hiddenLine>
             </a:ext>
             <a:ext uri="{AF507438-7753-43e0-B8FC-AC1667EBCBE1}">
-              <a14:hiddenEffects xmlns:a14="http://schemas.microsoft.com/office/drawing/2010/main" xmlns="">
+              <a14:hiddenEffects xmlns="" xmlns:a14="http://schemas.microsoft.com/office/drawing/2010/main">
                 <a:effectLst>
                   <a:outerShdw blurRad="63500" dist="38099" dir="2700000" algn="ctr" rotWithShape="0">
                     <a:schemeClr val="bg2">
@@ -47496,17 +47694,17 @@
           <a:effectLst/>
           <a:extLst>
             <a:ext uri="{FAA26D3D-D897-4be2-8F04-BA451C77F1D7}">
-              <ma14:placeholderFlag xmlns:ma14="http://schemas.microsoft.com/office/mac/drawingml/2011/main" xmlns="" val="1"/>
+              <ma14:placeholderFlag xmlns="" xmlns:ma14="http://schemas.microsoft.com/office/mac/drawingml/2011/main" val="1"/>
             </a:ext>
             <a:ext uri="{909E8E84-426E-40dd-AFC4-6F175D3DCCD1}">
-              <a14:hiddenFill xmlns:a14="http://schemas.microsoft.com/office/drawing/2010/main" xmlns="">
+              <a14:hiddenFill xmlns="" xmlns:a14="http://schemas.microsoft.com/office/drawing/2010/main">
                 <a:solidFill>
                   <a:schemeClr val="bg1"/>
                 </a:solidFill>
               </a14:hiddenFill>
             </a:ext>
             <a:ext uri="{91240B29-F687-4f45-9708-019B960494DF}">
-              <a14:hiddenLine xmlns:a14="http://schemas.microsoft.com/office/drawing/2010/main" xmlns="" w="12700">
+              <a14:hiddenLine xmlns="" xmlns:a14="http://schemas.microsoft.com/office/drawing/2010/main" w="12700">
                 <a:pattFill prst="narHorz">
                   <a:fgClr>
                     <a:schemeClr val="tx1"/>
@@ -47521,7 +47719,7 @@
               </a14:hiddenLine>
             </a:ext>
             <a:ext uri="{AF507438-7753-43e0-B8FC-AC1667EBCBE1}">
-              <a14:hiddenEffects xmlns:a14="http://schemas.microsoft.com/office/drawing/2010/main" xmlns="">
+              <a14:hiddenEffects xmlns="" xmlns:a14="http://schemas.microsoft.com/office/drawing/2010/main">
                 <a:effectLst>
                   <a:outerShdw blurRad="63500" dist="38099" dir="2700000" algn="ctr" rotWithShape="0">
                     <a:schemeClr val="bg2">
@@ -48230,7 +48428,7 @@
         <a:effectLst/>
         <a:extLst>
           <a:ext uri="{AF507438-7753-43e0-B8FC-AC1667EBCBE1}">
-            <a14:hiddenEffects xmlns:a14="http://schemas.microsoft.com/office/drawing/2010/main" xmlns="">
+            <a14:hiddenEffects xmlns="" xmlns:a14="http://schemas.microsoft.com/office/drawing/2010/main">
               <a:effectLst>
                 <a:outerShdw dist="35921" dir="2700000" algn="ctr" rotWithShape="0">
                   <a:schemeClr val="bg2"/>
@@ -48303,7 +48501,7 @@
         <a:effectLst/>
         <a:extLst>
           <a:ext uri="{AF507438-7753-43e0-B8FC-AC1667EBCBE1}">
-            <a14:hiddenEffects xmlns:a14="http://schemas.microsoft.com/office/drawing/2010/main" xmlns="">
+            <a14:hiddenEffects xmlns="" xmlns:a14="http://schemas.microsoft.com/office/drawing/2010/main">
               <a:effectLst>
                 <a:outerShdw dist="35921" dir="2700000" algn="ctr" rotWithShape="0">
                   <a:schemeClr val="bg2"/>

--- a/PPTs/L2-Exercises ANS.pptx
+++ b/PPTs/L2-Exercises ANS.pptx
@@ -1436,15 +1436,6 @@
               <a:buNone/>
             </a:pPr>
             <a:r>
-              <a:rPr lang="en-GB" dirty="0"/>
-              <a:t>text</a:t>
-            </a:r>
-          </a:p>
-          <a:p>
-            <a:pPr>
-              <a:buNone/>
-            </a:pPr>
-            <a:r>
               <a:rPr lang="en-GB" dirty="0">
                 <a:solidFill>
                   <a:srgbClr val="C5C8C6"/>
@@ -1552,15 +1543,6 @@
             <a:r>
               <a:rPr lang="en-GB" dirty="0"/>
               <a:t>:</a:t>
-            </a:r>
-          </a:p>
-          <a:p>
-            <a:pPr>
-              <a:buNone/>
-            </a:pPr>
-            <a:r>
-              <a:rPr lang="en-GB" dirty="0"/>
-              <a:t>text</a:t>
             </a:r>
           </a:p>
           <a:p>
@@ -1943,7 +1925,7 @@
           <a:p>
             <a:r>
               <a:rPr lang="en-GB" b="0" kern="0" dirty="0"/>
-              <a:t>ANS:</a:t>
+              <a:t>Options:</a:t>
             </a:r>
           </a:p>
           <a:p>
@@ -1983,6 +1965,10 @@
               </a:spcAft>
               <a:buNone/>
             </a:pPr>
+            <a:r>
+              <a:rPr lang="en-GB" b="0" kern="0" dirty="0"/>
+              <a:t>ANS: (C) u + 10 = x and v = y. The parent prints a = 0 (u) and the child prints a = 10 (x); both print the same virtual address of a (v = y).</a:t>
+            </a:r>
             <a:endParaRPr lang="en-GB" altLang="zh-CN" sz="1200" dirty="0">
               <a:solidFill>
                 <a:sysClr val="windowText" lastClr="000000"/>
@@ -1990,302 +1976,6 @@
               <a:latin typeface="Courier New"/>
               <a:cs typeface="Courier New"/>
             </a:endParaRPr>
-          </a:p>
-          <a:p>
-            <a:pPr marL="0" marR="1337310" indent="0" eaLnBrk="1" fontAlgn="auto" hangingPunct="1">
-              <a:lnSpc>
-                <a:spcPts val="1400"/>
-              </a:lnSpc>
-              <a:spcBef>
-                <a:spcPts val="425"/>
-              </a:spcBef>
-              <a:spcAft>
-                <a:spcPts val="0"/>
-              </a:spcAft>
-              <a:buNone/>
-            </a:pPr>
-            <a:r>
-              <a:rPr lang="en-GB" altLang="zh-CN" sz="1200" dirty="0">
-                <a:solidFill>
-                  <a:sysClr val="windowText" lastClr="000000"/>
-                </a:solidFill>
-                <a:latin typeface="Courier New"/>
-                <a:cs typeface="Courier New"/>
-              </a:rPr>
-              <a:t>Let u, v be the values printed by the parent process, and x, y be the values printed by the child process. Which one of the following is TRUE? </a:t>
-            </a:r>
-          </a:p>
-          <a:p>
-            <a:pPr marL="0" marR="1337310" indent="0" eaLnBrk="1" fontAlgn="auto" hangingPunct="1">
-              <a:lnSpc>
-                <a:spcPts val="1400"/>
-              </a:lnSpc>
-              <a:spcBef>
-                <a:spcPts val="425"/>
-              </a:spcBef>
-              <a:spcAft>
-                <a:spcPts val="0"/>
-              </a:spcAft>
-              <a:buNone/>
-            </a:pPr>
-            <a:r>
-              <a:rPr lang="en-GB" altLang="zh-CN" sz="1200" dirty="0">
-                <a:solidFill>
-                  <a:sysClr val="windowText" lastClr="000000"/>
-                </a:solidFill>
-                <a:latin typeface="Courier New"/>
-                <a:cs typeface="Courier New"/>
-              </a:rPr>
-              <a:t>(A) u = x + 10 and v = y</a:t>
-            </a:r>
-          </a:p>
-          <a:p>
-            <a:pPr marL="0" marR="1337310" indent="0" eaLnBrk="1" fontAlgn="auto" hangingPunct="1">
-              <a:lnSpc>
-                <a:spcPts val="1400"/>
-              </a:lnSpc>
-              <a:spcBef>
-                <a:spcPts val="425"/>
-              </a:spcBef>
-              <a:spcAft>
-                <a:spcPts val="0"/>
-              </a:spcAft>
-              <a:buNone/>
-            </a:pPr>
-            <a:r>
-              <a:rPr lang="en-GB" altLang="zh-CN" sz="1200" dirty="0">
-                <a:solidFill>
-                  <a:sysClr val="windowText" lastClr="000000"/>
-                </a:solidFill>
-                <a:latin typeface="Courier New"/>
-                <a:cs typeface="Courier New"/>
-              </a:rPr>
-              <a:t>(B) u = x + 10 and v != y</a:t>
-            </a:r>
-          </a:p>
-          <a:p>
-            <a:pPr marL="0" marR="1337310" indent="0" eaLnBrk="1" fontAlgn="auto" hangingPunct="1">
-              <a:lnSpc>
-                <a:spcPts val="1400"/>
-              </a:lnSpc>
-              <a:spcBef>
-                <a:spcPts val="425"/>
-              </a:spcBef>
-              <a:spcAft>
-                <a:spcPts val="0"/>
-              </a:spcAft>
-              <a:buNone/>
-            </a:pPr>
-            <a:r>
-              <a:rPr lang="en-GB" altLang="zh-CN" sz="1200" dirty="0">
-                <a:solidFill>
-                  <a:sysClr val="windowText" lastClr="000000"/>
-                </a:solidFill>
-                <a:latin typeface="Courier New"/>
-                <a:cs typeface="Courier New"/>
-              </a:rPr>
-              <a:t>(C) u + 10 = x and v = y</a:t>
-            </a:r>
-          </a:p>
-          <a:p>
-            <a:pPr marL="0" marR="1337310" indent="0" eaLnBrk="1" fontAlgn="auto" hangingPunct="1">
-              <a:lnSpc>
-                <a:spcPts val="1400"/>
-              </a:lnSpc>
-              <a:spcBef>
-                <a:spcPts val="425"/>
-              </a:spcBef>
-              <a:spcAft>
-                <a:spcPts val="0"/>
-              </a:spcAft>
-              <a:buNone/>
-            </a:pPr>
-            <a:r>
-              <a:rPr lang="en-GB" altLang="zh-CN" sz="1200" dirty="0">
-                <a:solidFill>
-                  <a:sysClr val="windowText" lastClr="000000"/>
-                </a:solidFill>
-                <a:latin typeface="Courier New"/>
-                <a:cs typeface="Courier New"/>
-              </a:rPr>
-              <a:t>(D) u + 10 = x and v != y</a:t>
-            </a:r>
-          </a:p>
-          <a:p>
-            <a:endParaRPr lang="en-GB" b="0" i="0" dirty="0">
-              <a:solidFill>
-                <a:srgbClr val="273239"/>
-              </a:solidFill>
-              <a:effectLst/>
-              <a:latin typeface="Nunito" pitchFamily="2" charset="0"/>
-            </a:endParaRPr>
-          </a:p>
-          <a:p>
-            <a:endParaRPr lang="en-GB" b="0" i="0" dirty="0">
-              <a:solidFill>
-                <a:srgbClr val="273239"/>
-              </a:solidFill>
-              <a:effectLst/>
-              <a:latin typeface="Nunito" pitchFamily="2" charset="0"/>
-            </a:endParaRPr>
-          </a:p>
-          <a:p>
-            <a:endParaRPr lang="en-GB" b="0" i="0" dirty="0">
-              <a:solidFill>
-                <a:srgbClr val="273239"/>
-              </a:solidFill>
-              <a:effectLst/>
-              <a:latin typeface="Nunito" pitchFamily="2" charset="0"/>
-            </a:endParaRPr>
-          </a:p>
-          <a:p>
-            <a:r>
-              <a:rPr lang="en-GB" b="0" i="0" dirty="0">
-                <a:solidFill>
-                  <a:srgbClr val="273239"/>
-                </a:solidFill>
-                <a:effectLst/>
-                <a:latin typeface="Nunito" pitchFamily="2" charset="0"/>
-              </a:rPr>
-              <a:t>The number of times ‘hello’ is printed is equal to the number of processes created. Total Number of Processes = 2</a:t>
-            </a:r>
-            <a:r>
-              <a:rPr lang="en-GB" b="0" i="0" baseline="30000" dirty="0">
-                <a:solidFill>
-                  <a:srgbClr val="273239"/>
-                </a:solidFill>
-                <a:effectLst/>
-                <a:latin typeface="Nunito" pitchFamily="2" charset="0"/>
-              </a:rPr>
-              <a:t>n</a:t>
-            </a:r>
-            <a:r>
-              <a:rPr lang="en-GB" b="0" i="0" dirty="0">
-                <a:solidFill>
-                  <a:srgbClr val="273239"/>
-                </a:solidFill>
-                <a:effectLst/>
-                <a:latin typeface="Nunito" pitchFamily="2" charset="0"/>
-              </a:rPr>
-              <a:t>, where n is the number of fork system calls. So here n = 3, 2</a:t>
-            </a:r>
-            <a:r>
-              <a:rPr lang="en-GB" b="0" i="0" baseline="30000" dirty="0">
-                <a:solidFill>
-                  <a:srgbClr val="273239"/>
-                </a:solidFill>
-                <a:effectLst/>
-                <a:latin typeface="Nunito" pitchFamily="2" charset="0"/>
-              </a:rPr>
-              <a:t>3</a:t>
-            </a:r>
-            <a:r>
-              <a:rPr lang="en-GB" b="0" i="0" dirty="0">
-                <a:solidFill>
-                  <a:srgbClr val="273239"/>
-                </a:solidFill>
-                <a:effectLst/>
-                <a:latin typeface="Nunito" pitchFamily="2" charset="0"/>
-              </a:rPr>
-              <a:t> = 8 Let us put some label names for the three lines:’</a:t>
-            </a:r>
-            <a:endParaRPr lang="en-GB" sz="1200" b="0" kern="0" dirty="0"/>
-          </a:p>
-          <a:p>
-            <a:endParaRPr lang="en-GB" sz="1200" b="0" kern="0" dirty="0"/>
-          </a:p>
-          <a:p>
-            <a:endParaRPr lang="en-GB" sz="1200" b="0" kern="0" dirty="0"/>
-          </a:p>
-          <a:p>
-            <a:r>
-              <a:rPr lang="en-GB" sz="1200" b="0" kern="0" dirty="0"/>
-              <a:t> Let us put some label names for the three lines:</a:t>
-            </a:r>
-          </a:p>
-          <a:p>
-            <a:r>
-              <a:rPr lang="en-GB" sz="1200" b="0" kern="0" dirty="0"/>
-              <a:t>fork ();   // Line 1</a:t>
-            </a:r>
-          </a:p>
-          <a:p>
-            <a:r>
-              <a:rPr lang="en-GB" sz="1200" b="0" kern="0" dirty="0"/>
-              <a:t>fork ();   // Line 2</a:t>
-            </a:r>
-          </a:p>
-          <a:p>
-            <a:r>
-              <a:rPr lang="en-GB" sz="1200" b="0" kern="0" dirty="0"/>
-              <a:t>fork ();   // Line 3</a:t>
-            </a:r>
-          </a:p>
-          <a:p>
-            <a:r>
-              <a:rPr lang="en-GB" sz="1200" b="0" kern="0" dirty="0"/>
-              <a:t>       L1       // 1 child process created by line 1.</a:t>
-            </a:r>
-          </a:p>
-          <a:p>
-            <a:r>
-              <a:rPr lang="en-GB" sz="1200" b="0" kern="0" dirty="0"/>
-              <a:t>    /     \     </a:t>
-            </a:r>
-          </a:p>
-          <a:p>
-            <a:r>
-              <a:rPr lang="en-GB" sz="1200" b="0" kern="0" dirty="0"/>
-              <a:t>  L2      </a:t>
-            </a:r>
-            <a:r>
-              <a:rPr lang="en-GB" sz="1200" b="0" kern="0" dirty="0" err="1"/>
-              <a:t>L2</a:t>
-            </a:r>
-            <a:r>
-              <a:rPr lang="en-GB" sz="1200" b="0" kern="0" dirty="0"/>
-              <a:t>    // 2 child processes created by line 2.</a:t>
-            </a:r>
-          </a:p>
-          <a:p>
-            <a:r>
-              <a:rPr lang="en-GB" sz="1200" b="0" kern="0" dirty="0"/>
-              <a:t> /  \    /  \   </a:t>
-            </a:r>
-          </a:p>
-          <a:p>
-            <a:r>
-              <a:rPr lang="en-GB" sz="1200" b="0" kern="0" dirty="0"/>
-              <a:t>L3  </a:t>
-            </a:r>
-            <a:r>
-              <a:rPr lang="en-GB" sz="1200" b="0" kern="0" dirty="0" err="1"/>
-              <a:t>L3</a:t>
-            </a:r>
-            <a:r>
-              <a:rPr lang="en-GB" sz="1200" b="0" kern="0" dirty="0"/>
-              <a:t>  </a:t>
-            </a:r>
-            <a:r>
-              <a:rPr lang="en-GB" sz="1200" b="0" kern="0" dirty="0" err="1"/>
-              <a:t>L3</a:t>
-            </a:r>
-            <a:r>
-              <a:rPr lang="en-GB" sz="1200" b="0" kern="0" dirty="0"/>
-              <a:t>  </a:t>
-            </a:r>
-            <a:r>
-              <a:rPr lang="en-GB" sz="1200" b="0" kern="0" dirty="0" err="1"/>
-              <a:t>L3</a:t>
-            </a:r>
-            <a:r>
-              <a:rPr lang="en-GB" sz="1200" b="0" kern="0" dirty="0"/>
-              <a:t>  // 4 child processes created by line 3.</a:t>
-            </a:r>
-            <a:endParaRPr lang="en-US" sz="1200" b="0" kern="0" dirty="0"/>
-          </a:p>
-          <a:p>
-            <a:endParaRPr lang="en-SE" dirty="0"/>
           </a:p>
         </p:txBody>
       </p:sp>
@@ -2570,11 +2260,11 @@
             </a:r>
             <a:r>
               <a:rPr lang="en-GB" dirty="0"/>
-              <a:t> pid1 = fork(); This creates a child process. Now there are two processes: the parent and the child. </a:t>
+              <a:t> pid1 = fork(); This creates a child process. Now there are two processes: the parent (P0) and the child (P1). </a:t>
             </a:r>
             <a:r>
               <a:rPr lang="en-GB" sz="1200" b="0" kern="0" dirty="0"/>
-              <a:t>executing fork on line 4. After fork returns both in P0 and P1, we have two </a:t>
+              <a:t/>
             </a:r>
             <a:endParaRPr lang="en-GB" dirty="0"/>
           </a:p>
@@ -2667,7 +2357,7 @@
           <a:p>
             <a:r>
               <a:rPr lang="en-GB" sz="1200" b="0" kern="0" dirty="0"/>
-              <a:t>Line 5 checks for the value returned from the first and second fork. If the first fork returned pid1 &gt; 0 (i.e. we are in the original process P0) and the second form returned pid2==0 (i.e. we are in the child process ),</a:t>
+              <a:t>Line 5 checks for the value returned from the first and second fork. If the first fork returned pid1 &gt; 0 (i.e. we are in the original process P0) and the second fork returned pid2==0 (i.e. we are in the child process ),</a:t>
             </a:r>
           </a:p>
           <a:p>
@@ -2763,7 +2453,7 @@
             </a:r>
             <a:r>
               <a:rPr lang="en-GB" sz="1200" b="0" kern="0" dirty="0"/>
-              <a:t>(pid1&gt;0||?) = (true&amp;&amp;?)=true, so it stops here and does not call any more fork(). (? stands for either true or false).</a:t>
+              <a:t>(pid1&gt;0||?) = (true||?)=true, so the second operand pid2=fork() is not evaluated (short-circuit) and P0 enters the if body (line 4). (? stands for either true or false).</a:t>
             </a:r>
             <a:endParaRPr lang="en-GB" sz="1200" kern="0" dirty="0"/>
           </a:p>
@@ -2776,25 +2466,25 @@
           <a:p>
             <a:r>
               <a:rPr lang="en-GB" sz="1200" b="0" kern="0" dirty="0"/>
-              <a:t>Line 4: In P0, since pid1 &gt; 0 in P0, the condition (pid1=fork()||pid2=fork())=(true||?)=true, so P0 goes into Line 4 and calls pid3=fork() to create child process P2. </a:t>
+              <a:t>Line 4: In P0, the condition (pid1&gt;0||pid2&gt;0)=(true||?)=true, so P0 goes into Line 4 and calls pid3=fork() to create child process P2. </a:t>
             </a:r>
           </a:p>
           <a:p>
             <a:r>
               <a:rPr lang="en-GB" sz="1200" b="0" kern="0" dirty="0"/>
-              <a:t>Line 3: Child P1 has pid1==0, so it calls pid2=fork() and creates child process P3. In P3, (pid1=fork()||pid2=fork())=(false||false)=false, so it does not go into Line 4.</a:t>
+              <a:t>Line 3: Child P1 has pid1==0, so it calls pid2=fork() and creates child process P3. In P3, (pid1&gt;0||pid2&gt;0)=(false||false)=false, so it does not go into Line 4.</a:t>
             </a:r>
           </a:p>
           <a:p>
             <a:r>
               <a:rPr lang="en-GB" sz="1200" b="0" kern="0" dirty="0"/>
-              <a:t>Line 4: In P1, since pid2&gt;0, the condition (pid1=fork()||pid2=fork())=(false||true)=true, so P1 goes into Line 4 and calls pid3=fork() to create child process P4.</a:t>
+              <a:t>Line 4: In P1, since pid2&gt;0, the condition (pid1&gt;0||pid2&gt;0)=(false||true)=true, so P1 goes into Line 4 and calls pid3=fork() to create child process P4.</a:t>
             </a:r>
           </a:p>
           <a:p>
             <a:r>
               <a:rPr lang="en-GB" sz="1200" b="0" kern="0" dirty="0"/>
-              <a:t>Each of the 5 processes P0 to P4 prints a ”Hello”.</a:t>
+              <a:t>In total there are 5 processes: P0 to P4.</a:t>
             </a:r>
           </a:p>
           <a:p>
@@ -5777,7 +5467,12 @@
             <p:ph type="title"/>
           </p:nvPr>
         </p:nvSpPr>
-        <p:spPr/>
+        <p:spPr>
+          <a:xfrm>
+            <a:off x="1320800" y="152400"/>
+            <a:ext cx="9550400" cy="533400"/>
+          </a:xfrm>
+        </p:spPr>
         <p:txBody>
           <a:bodyPr/>
           <a:lstStyle/>
@@ -6722,7 +6417,7 @@
             <a:pPr lvl="1"/>
             <a:r>
               <a:rPr lang="en-GB" sz="1400" b="0" kern="0" dirty="0"/>
-              <a:t>Each of the 8 processes P0 to P7 prints a ”Hello”.</a:t>
+              <a:t>Each of the 8 processes P0 to P7 prints a “Hello”.</a:t>
             </a:r>
           </a:p>
           <a:p>
@@ -15244,7 +14939,12 @@
             <p:ph type="title"/>
           </p:nvPr>
         </p:nvSpPr>
-        <p:spPr/>
+        <p:spPr>
+          <a:xfrm>
+            <a:off x="1320800" y="152400"/>
+            <a:ext cx="9550400" cy="533400"/>
+          </a:xfrm>
+        </p:spPr>
         <p:txBody>
           <a:bodyPr/>
           <a:lstStyle/>
@@ -15272,7 +14972,7 @@
         <p:spPr>
           <a:xfrm>
             <a:off x="69498" y="837966"/>
-            <a:ext cx="5401464" cy="1574149"/>
+            <a:ext cx="5943600" cy="1574149"/>
           </a:xfrm>
           <a:prstGeom prst="rect">
             <a:avLst/>
@@ -15675,7 +15375,7 @@
                 <a:latin typeface="Courier New"/>
                 <a:cs typeface="Courier New"/>
               </a:rPr>
-              <a:t> i</a:t>
+              <a:t> %d</a:t>
             </a:r>
             <a:r>
               <a:rPr sz="1600" b="0" kern="0" spc="-10" dirty="0">
@@ -15685,7 +15385,7 @@
                 <a:latin typeface="Courier New"/>
                 <a:cs typeface="Courier New"/>
               </a:rPr>
-              <a:t>\n");</a:t>
+              <a:t>\n", i);</a:t>
             </a:r>
             <a:r>
               <a:rPr lang="en-GB" sz="1600" b="0" kern="0" spc="-15" dirty="0">
@@ -24874,7 +24574,12 @@
             <p:ph type="title"/>
           </p:nvPr>
         </p:nvSpPr>
-        <p:spPr/>
+        <p:spPr>
+          <a:xfrm>
+            <a:off x="1320800" y="152400"/>
+            <a:ext cx="9550400" cy="533400"/>
+          </a:xfrm>
+        </p:spPr>
         <p:txBody>
           <a:bodyPr/>
           <a:lstStyle/>
@@ -25008,7 +24713,7 @@
                 <a:latin typeface="Courier New"/>
                 <a:cs typeface="Courier New"/>
               </a:rPr>
-              <a:t>While(true) fork();</a:t>
+              <a:t>while (1) fork();</a:t>
             </a:r>
             <a:r>
               <a:rPr sz="1600" b="0" kern="0" dirty="0">
@@ -25381,7 +25086,7 @@
             <a:pPr lvl="1"/>
             <a:r>
               <a:rPr lang="en-GB" b="0" kern="0" dirty="0"/>
-              <a:t>Limit User Processes:  Use </a:t>
+              <a:t>Limit User Processes: Use </a:t>
             </a:r>
             <a:r>
               <a:rPr lang="en-GB" b="0" kern="0" dirty="0" err="1"/>
@@ -31836,7 +31541,12 @@
             <p:ph type="title"/>
           </p:nvPr>
         </p:nvSpPr>
-        <p:spPr/>
+        <p:spPr>
+          <a:xfrm>
+            <a:off x="1320800" y="152400"/>
+            <a:ext cx="9550400" cy="533400"/>
+          </a:xfrm>
+        </p:spPr>
         <p:txBody>
           <a:bodyPr/>
           <a:lstStyle/>
@@ -32037,7 +31747,7 @@
                 <a:latin typeface="Courier New"/>
                 <a:cs typeface="Courier New"/>
               </a:rPr>
-              <a:t>:</a:t>
+              <a:t>;</a:t>
             </a:r>
             <a:endParaRPr lang="en-GB" sz="1600" b="0" kern="0" dirty="0">
               <a:solidFill>
@@ -32067,7 +31777,7 @@
                 <a:latin typeface="Courier New"/>
                 <a:cs typeface="Courier New"/>
               </a:rPr>
-              <a:t>5 }</a:t>
+              <a:t>6 }</a:t>
             </a:r>
             <a:endParaRPr sz="1600" b="0" kern="0" dirty="0">
               <a:solidFill>
@@ -32351,7 +32061,7 @@
           <a:p>
             <a:r>
               <a:rPr lang="en-GB" sz="1600" b="0" kern="0" dirty="0"/>
-              <a:t>The initial process P0 calls pid1=fork() to create child process P1. In P0, the if condition (pid1&gt;0||?) = (true&amp;&amp;?)=true, so P0 skips the call pid2=fork() and calls pid3=fork() to create child process P2. </a:t>
+              <a:t>The initial process P0 calls pid1=fork() to create child process P1. In P0, the if condition (pid1&gt;0||?) = (true||?)=true, so P0 skips the call pid2=fork() and calls pid3=fork() to create child process P2. </a:t>
             </a:r>
           </a:p>
           <a:p>
@@ -36744,7 +36454,7 @@
             </a:r>
             <a:r>
               <a:rPr lang="nb-NO" dirty="0"/>
-              <a:t>()</a:t>
+              <a:t>(0)</a:t>
             </a:r>
             <a:r>
               <a:rPr lang="en-GB" dirty="0"/>
@@ -36964,7 +36674,7 @@
                 <a:latin typeface="Courier New" panose="02070309020205020404" pitchFamily="49" charset="0"/>
                 <a:cs typeface="Courier New" panose="02070309020205020404" pitchFamily="49" charset="0"/>
               </a:rPr>
-              <a:t>	  wait(NULL);  // Wait for immediate child to terminate</a:t>
+              <a:t>            wait(NULL);  // Wait for immediate child to terminate</a:t>
             </a:r>
           </a:p>
           <a:p>
@@ -39674,7 +39384,7 @@
             </a:r>
             <a:r>
               <a:rPr lang="en-GB" sz="2400" dirty="0"/>
-              <a:t>("Child\n")) will not be executed because it is now running SOME_COMMAND, not the code shown in the text box.</a:t>
+              <a:t>("Hello again %d\n", i)) will not be executed because it is now running SOME_COMMAND, not the code shown in the text box.</a:t>
             </a:r>
           </a:p>
           <a:p>
@@ -39908,7 +39618,7 @@
                 <a:latin typeface="Courier New" panose="02070309020205020404" pitchFamily="49" charset="0"/>
                 <a:cs typeface="Courier New" panose="02070309020205020404" pitchFamily="49" charset="0"/>
               </a:rPr>
-              <a:t>	  return 0;  // Exit child process</a:t>
+              <a:t>            return 0;  // Exit child process</a:t>
             </a:r>
           </a:p>
           <a:p>
@@ -42908,6 +42618,13 @@
             </a:r>
           </a:p>
           <a:p>
+            <a:r>
+              <a:rPr lang="en-GB" sz="1400" b="0" dirty="0">
+                <a:latin typeface="Courier New" panose="02070309020205020404" pitchFamily="49" charset="0"/>
+                <a:cs typeface="Courier New" panose="02070309020205020404" pitchFamily="49" charset="0"/>
+              </a:rPr>
+              <a:t>    pid_t pid;</a:t>
+            </a:r>
             <a:endParaRPr lang="en-GB" sz="1400" b="0" dirty="0">
               <a:latin typeface="Courier New" panose="02070309020205020404" pitchFamily="49" charset="0"/>
               <a:cs typeface="Courier New" panose="02070309020205020404" pitchFamily="49" charset="0"/>
@@ -42935,14 +42652,14 @@
                 <a:latin typeface="Courier New" panose="02070309020205020404" pitchFamily="49" charset="0"/>
                 <a:cs typeface="Courier New" panose="02070309020205020404" pitchFamily="49" charset="0"/>
               </a:rPr>
-              <a:t>pid_t</a:t>
+              <a:t/>
             </a:r>
             <a:r>
               <a:rPr lang="en-GB" sz="1400" b="0" dirty="0">
                 <a:latin typeface="Courier New" panose="02070309020205020404" pitchFamily="49" charset="0"/>
                 <a:cs typeface="Courier New" panose="02070309020205020404" pitchFamily="49" charset="0"/>
               </a:rPr>
-              <a:t> </a:t>
+              <a:t/>
             </a:r>
             <a:r>
               <a:rPr lang="en-GB" sz="1400" b="0" dirty="0" err="1">
@@ -43326,6 +43043,13 @@
             </a:r>
           </a:p>
           <a:p>
+            <a:r>
+              <a:rPr lang="en-GB" sz="1400" b="0" dirty="0">
+                <a:latin typeface="Courier New" panose="02070309020205020404" pitchFamily="49" charset="0"/>
+                <a:cs typeface="Courier New" panose="02070309020205020404" pitchFamily="49" charset="0"/>
+              </a:rPr>
+              <a:t>    pid_t pid;</a:t>
+            </a:r>
             <a:endParaRPr lang="en-GB" sz="1400" b="0" dirty="0">
               <a:latin typeface="Courier New" panose="02070309020205020404" pitchFamily="49" charset="0"/>
               <a:cs typeface="Courier New" panose="02070309020205020404" pitchFamily="49" charset="0"/>
@@ -43353,14 +43077,14 @@
                 <a:latin typeface="Courier New" panose="02070309020205020404" pitchFamily="49" charset="0"/>
                 <a:cs typeface="Courier New" panose="02070309020205020404" pitchFamily="49" charset="0"/>
               </a:rPr>
-              <a:t>pid_t</a:t>
+              <a:t/>
             </a:r>
             <a:r>
               <a:rPr lang="en-GB" sz="1400" b="0" dirty="0">
                 <a:latin typeface="Courier New" panose="02070309020205020404" pitchFamily="49" charset="0"/>
                 <a:cs typeface="Courier New" panose="02070309020205020404" pitchFamily="49" charset="0"/>
               </a:rPr>
-              <a:t> </a:t>
+              <a:t/>
             </a:r>
             <a:r>
               <a:rPr lang="en-GB" sz="1400" b="0" dirty="0" err="1">
@@ -45741,7 +45465,12 @@
             <p:ph type="title"/>
           </p:nvPr>
         </p:nvSpPr>
-        <p:spPr/>
+        <p:spPr>
+          <a:xfrm>
+            <a:off x="1320800" y="152400"/>
+            <a:ext cx="9550400" cy="533400"/>
+          </a:xfrm>
+        </p:spPr>
         <p:txBody>
           <a:bodyPr/>
           <a:lstStyle/>
@@ -46056,7 +45785,7 @@
           <a:p>
             <a:r>
               <a:rPr lang="en-GB" sz="2600" b="0" kern="0" dirty="0"/>
-              <a:t>In the following examples, we omit the check for p&lt;0 and assume fork() calls are always successful.</a:t>
+              <a:t>In the following examples, we omit the check for pid&lt;0 and assume fork() calls are always successful.</a:t>
             </a:r>
             <a:endParaRPr lang="en-US" sz="2600" b="0" kern="0" dirty="0"/>
           </a:p>
@@ -46439,6 +46168,49 @@
                 <a:cs typeface="Courier New"/>
               </a:rPr>
               <a:t>unistd.h</a:t>
+            </a:r>
+            <a:r>
+              <a:rPr lang="en-GB" sz="1600" b="0" kern="0" dirty="0">
+                <a:solidFill>
+                  <a:sysClr val="windowText" lastClr="000000"/>
+                </a:solidFill>
+                <a:latin typeface="Courier New"/>
+                <a:cs typeface="Courier New"/>
+              </a:rPr>
+              <a:t>&gt;</a:t>
+            </a:r>
+          </a:p>
+          <a:p>
+            <a:pPr marL="52069" marR="1337310" eaLnBrk="1" fontAlgn="auto" hangingPunct="1">
+              <a:lnSpc>
+                <a:spcPts val="1400"/>
+              </a:lnSpc>
+              <a:spcBef>
+                <a:spcPts val="425"/>
+              </a:spcBef>
+              <a:spcAft>
+                <a:spcPts val="0"/>
+              </a:spcAft>
+            </a:pPr>
+            <a:r>
+              <a:rPr lang="en-GB" sz="1600" b="0" kern="0" dirty="0">
+                <a:solidFill>
+                  <a:sysClr val="windowText" lastClr="000000"/>
+                </a:solidFill>
+                <a:latin typeface="Courier New"/>
+                <a:cs typeface="Courier New"/>
+              </a:rPr>
+              <a:t>#include &lt;</a:t>
+            </a:r>
+            <a:r>
+              <a:rPr lang="en-GB" sz="1600" b="0" kern="0" dirty="0" err="1">
+                <a:solidFill>
+                  <a:sysClr val="windowText" lastClr="000000"/>
+                </a:solidFill>
+                <a:latin typeface="Courier New"/>
+                <a:cs typeface="Courier New"/>
+              </a:rPr>
+              <a:t>stdlib.h</a:t>
             </a:r>
             <a:r>
               <a:rPr lang="en-GB" sz="1600" b="0" kern="0" dirty="0">
@@ -47068,7 +46840,12 @@
             <p:ph type="title"/>
           </p:nvPr>
         </p:nvSpPr>
-        <p:spPr/>
+        <p:spPr>
+          <a:xfrm>
+            <a:off x="1320800" y="152400"/>
+            <a:ext cx="9550400" cy="533400"/>
+          </a:xfrm>
+        </p:spPr>
         <p:txBody>
           <a:bodyPr/>
           <a:lstStyle/>
@@ -47163,7 +46940,7 @@
                 <a:latin typeface="Courier New"/>
                 <a:cs typeface="Courier New"/>
               </a:rPr>
-              <a:t>if (</a:t>
+              <a:t>if ((</a:t>
             </a:r>
             <a:r>
               <a:rPr lang="en-GB" altLang="zh-CN" sz="1600" dirty="0" err="1">
@@ -47183,7 +46960,7 @@
                 <a:latin typeface="Courier New"/>
                 <a:cs typeface="Courier New"/>
               </a:rPr>
-              <a:t>=fork()==0) {</a:t>
+              <a:t>=fork())==0) {</a:t>
             </a:r>
           </a:p>
           <a:p>
@@ -47251,7 +47028,7 @@
                 <a:latin typeface="Courier New"/>
                 <a:cs typeface="Courier New"/>
               </a:rPr>
-              <a:t>(“In child, a=%d, a memory address=%d\n", a, &amp;a);</a:t>
+              <a:t>("In child, a=%d, a memory address=%p\n", a, (void *)&amp;a);</a:t>
             </a:r>
           </a:p>
           <a:p>
@@ -47323,7 +47100,7 @@
                 <a:latin typeface="Courier New"/>
                 <a:cs typeface="Courier New"/>
               </a:rPr>
-              <a:t>    a = a – 5;</a:t>
+              <a:t>    a = a - 5;</a:t>
             </a:r>
           </a:p>
           <a:p>
@@ -47367,7 +47144,7 @@
                 <a:latin typeface="Courier New"/>
                 <a:cs typeface="Courier New"/>
               </a:rPr>
-              <a:t>(“In parent, a=%d, a memory address=%d\n", a, &amp;a);</a:t>
+              <a:t>("In parent, a=%d, a memory address=%p\n", a, (void *)&amp;a);</a:t>
             </a:r>
           </a:p>
           <a:p>
@@ -47654,7 +47431,7 @@
           <a:p>
             <a:r>
               <a:rPr lang="en-GB" b="0" kern="0" dirty="0"/>
-              <a:t>In Child (x), a = a + 5 = 10; In Parent (u), a = a – 5 = 0. </a:t>
+              <a:t>In Child (x), a = a + 5 = 10; In Parent (u), a = a - 5 = 0. </a:t>
             </a:r>
           </a:p>
           <a:p>
@@ -48076,7 +47853,7 @@
           <a:p>
             <a:r>
               <a:rPr lang="en-GB" altLang="zh-CN" sz="2000" b="0" kern="0" dirty="0"/>
-              <a:t>In parent, a = 0, a memory address=0x1234</a:t>
+              <a:t>In parent, a=0, a memory address=0x1234</a:t>
             </a:r>
           </a:p>
           <a:p>
@@ -48100,7 +47877,7 @@
           <a:p>
             <a:r>
               <a:rPr lang="en-GB" altLang="zh-CN" sz="2000" b="0" kern="0" dirty="0"/>
-              <a:t>In parent, a = 0, a memory address=0x1234</a:t>
+              <a:t>In parent, a=0, a memory address=0x1234</a:t>
             </a:r>
           </a:p>
         </p:txBody>
